--- a/media/exports/reports/2026-09/growth-trades.pptx
+++ b/media/exports/reports/2026-09/growth-trades.pptx
@@ -246,76 +246,76 @@
                 <c:formatCode>$#,##0;[Red]($#,##0);"-"</c:formatCode>
                 <c:ptCount val="24"/>
                 <c:pt idx="0">
-                  <c:v>171009</c:v>
+                  <c:v>191014</c:v>
                 </c:pt>
                 <c:pt idx="1">
-                  <c:v>179474</c:v>
+                  <c:v>200124</c:v>
                 </c:pt>
                 <c:pt idx="2">
-                  <c:v>143156</c:v>
+                  <c:v>159406</c:v>
                 </c:pt>
                 <c:pt idx="3">
-                  <c:v>140909</c:v>
+                  <c:v>156794</c:v>
                 </c:pt>
                 <c:pt idx="4">
-                  <c:v>160943</c:v>
+                  <c:v>179190</c:v>
                 </c:pt>
                 <c:pt idx="5">
-                  <c:v>135082</c:v>
+                  <c:v>150465</c:v>
                 </c:pt>
                 <c:pt idx="6">
-                  <c:v>124705</c:v>
+                  <c:v>138865</c:v>
                 </c:pt>
                 <c:pt idx="7">
-                  <c:v>129816</c:v>
+                  <c:v>144649</c:v>
                 </c:pt>
                 <c:pt idx="8">
-                  <c:v>164113</c:v>
+                  <c:v>183265</c:v>
                 </c:pt>
                 <c:pt idx="9">
-                  <c:v>186760</c:v>
+                  <c:v>208588</c:v>
                 </c:pt>
                 <c:pt idx="10">
-                  <c:v>139164</c:v>
+                  <c:v>155118</c:v>
                 </c:pt>
                 <c:pt idx="11">
-                  <c:v>128255</c:v>
+                  <c:v>143077</c:v>
                 </c:pt>
                 <c:pt idx="12">
-                  <c:v>128898</c:v>
+                  <c:v>143566</c:v>
                 </c:pt>
                 <c:pt idx="13">
-                  <c:v>174786</c:v>
+                  <c:v>194966</c:v>
                 </c:pt>
                 <c:pt idx="14">
-                  <c:v>135079</c:v>
+                  <c:v>150283</c:v>
                 </c:pt>
                 <c:pt idx="15">
-                  <c:v>164780</c:v>
+                  <c:v>183306</c:v>
                 </c:pt>
                 <c:pt idx="16">
-                  <c:v>196372</c:v>
+                  <c:v>218908</c:v>
                 </c:pt>
                 <c:pt idx="17">
-                  <c:v>191500</c:v>
+                  <c:v>213578</c:v>
                 </c:pt>
                 <c:pt idx="18">
-                  <c:v>164987</c:v>
+                  <c:v>183967</c:v>
                 </c:pt>
                 <c:pt idx="19">
-                  <c:v>161963</c:v>
+                  <c:v>180342</c:v>
                 </c:pt>
                 <c:pt idx="20">
-                  <c:v>173163</c:v>
+                  <c:v>193032</c:v>
                 </c:pt>
                 <c:pt idx="21">
-                  <c:v>193245</c:v>
+                  <c:v>215610</c:v>
                 </c:pt>
                 <c:pt idx="22">
-                  <c:v>179007</c:v>
+                  <c:v>199523</c:v>
                 </c:pt>
                 <c:pt idx="23">
-                  <c:v>202337</c:v>
+                  <c:v>225460</c:v>
                 </c:pt>
               </c:numCache>
             </c:numRef>
@@ -558,76 +558,76 @@
                 <c:formatCode>$#,##0;[Red]($#,##0);"-"</c:formatCode>
                 <c:ptCount val="24"/>
                 <c:pt idx="0">
-                  <c:v>24670</c:v>
+                  <c:v>27650</c:v>
                 </c:pt>
                 <c:pt idx="1">
-                  <c:v>24670</c:v>
+                  <c:v>27650</c:v>
                 </c:pt>
                 <c:pt idx="2">
-                  <c:v>24670</c:v>
+                  <c:v>27650</c:v>
                 </c:pt>
                 <c:pt idx="3">
-                  <c:v>24670</c:v>
+                  <c:v>27650</c:v>
                 </c:pt>
                 <c:pt idx="4">
-                  <c:v>27930</c:v>
+                  <c:v>31300</c:v>
                 </c:pt>
                 <c:pt idx="5">
-                  <c:v>27930</c:v>
+                  <c:v>31300</c:v>
                 </c:pt>
                 <c:pt idx="6">
-                  <c:v>27930</c:v>
+                  <c:v>31300</c:v>
                 </c:pt>
                 <c:pt idx="7">
-                  <c:v>27930</c:v>
+                  <c:v>31300</c:v>
                 </c:pt>
                 <c:pt idx="8">
-                  <c:v>31870</c:v>
+                  <c:v>35720</c:v>
                 </c:pt>
                 <c:pt idx="9">
-                  <c:v>33200</c:v>
+                  <c:v>37200</c:v>
                 </c:pt>
                 <c:pt idx="10">
-                  <c:v>33200</c:v>
+                  <c:v>37200</c:v>
                 </c:pt>
                 <c:pt idx="11">
-                  <c:v>33200</c:v>
+                  <c:v>37200</c:v>
                 </c:pt>
                 <c:pt idx="12">
-                  <c:v>35800</c:v>
+                  <c:v>40100</c:v>
                 </c:pt>
                 <c:pt idx="13">
-                  <c:v>35800</c:v>
+                  <c:v>40100</c:v>
                 </c:pt>
                 <c:pt idx="14">
-                  <c:v>35800</c:v>
+                  <c:v>40100</c:v>
                 </c:pt>
                 <c:pt idx="15">
-                  <c:v>35800</c:v>
+                  <c:v>40100</c:v>
                 </c:pt>
                 <c:pt idx="16">
-                  <c:v>37500</c:v>
+                  <c:v>42000</c:v>
                 </c:pt>
                 <c:pt idx="17">
-                  <c:v>37500</c:v>
+                  <c:v>42000</c:v>
                 </c:pt>
                 <c:pt idx="18">
-                  <c:v>37500</c:v>
+                  <c:v>42000</c:v>
                 </c:pt>
                 <c:pt idx="19">
-                  <c:v>40500</c:v>
+                  <c:v>45350</c:v>
                 </c:pt>
                 <c:pt idx="20">
-                  <c:v>40500</c:v>
+                  <c:v>45350</c:v>
                 </c:pt>
                 <c:pt idx="21">
-                  <c:v>40500</c:v>
+                  <c:v>45350</c:v>
                 </c:pt>
                 <c:pt idx="22">
-                  <c:v>40500</c:v>
+                  <c:v>45350</c:v>
                 </c:pt>
                 <c:pt idx="23">
-                  <c:v>40500</c:v>
+                  <c:v>45350</c:v>
                 </c:pt>
               </c:numCache>
             </c:numRef>
@@ -870,76 +870,76 @@
                 <c:formatCode>$#,##0;[Red]($#,##0);"-"</c:formatCode>
                 <c:ptCount val="24"/>
                 <c:pt idx="0">
+                  <c:v>141600</c:v>
+                </c:pt>
+                <c:pt idx="1">
+                  <c:v>147100</c:v>
+                </c:pt>
+                <c:pt idx="2">
+                  <c:v>103700</c:v>
+                </c:pt>
+                <c:pt idx="3">
+                  <c:v>100100</c:v>
+                </c:pt>
+                <c:pt idx="4">
+                  <c:v>118600</c:v>
+                </c:pt>
+                <c:pt idx="5">
+                  <c:v>96400</c:v>
+                </c:pt>
+                <c:pt idx="6">
+                  <c:v>83900</c:v>
+                </c:pt>
+                <c:pt idx="7">
+                  <c:v>89900</c:v>
+                </c:pt>
+                <c:pt idx="8">
                   <c:v>126300</c:v>
                 </c:pt>
-                <c:pt idx="1">
-                  <c:v>131400</c:v>
-                </c:pt>
-                <c:pt idx="2">
-                  <c:v>92600</c:v>
-                </c:pt>
-                <c:pt idx="3">
-                  <c:v>89400</c:v>
-                </c:pt>
-                <c:pt idx="4">
-                  <c:v>106000</c:v>
-                </c:pt>
-                <c:pt idx="5">
-                  <c:v>86100</c:v>
-                </c:pt>
-                <c:pt idx="6">
-                  <c:v>74900</c:v>
-                </c:pt>
-                <c:pt idx="7">
-                  <c:v>80300</c:v>
-                </c:pt>
-                <c:pt idx="8">
-                  <c:v>112700</c:v>
-                </c:pt>
                 <c:pt idx="9">
-                  <c:v>135800</c:v>
+                  <c:v>152100</c:v>
                 </c:pt>
                 <c:pt idx="10">
-                  <c:v>86200</c:v>
+                  <c:v>96500</c:v>
                 </c:pt>
                 <c:pt idx="11">
-                  <c:v>75100</c:v>
+                  <c:v>84200</c:v>
                 </c:pt>
                 <c:pt idx="12">
-                  <c:v>70800</c:v>
+                  <c:v>79300</c:v>
                 </c:pt>
                 <c:pt idx="13">
-                  <c:v>113300</c:v>
+                  <c:v>126900</c:v>
                 </c:pt>
                 <c:pt idx="14">
-                  <c:v>69700</c:v>
+                  <c:v>78100</c:v>
                 </c:pt>
                 <c:pt idx="15">
-                  <c:v>97500</c:v>
+                  <c:v>109100</c:v>
                 </c:pt>
                 <c:pt idx="16">
-                  <c:v>129300</c:v>
+                  <c:v>144800</c:v>
                 </c:pt>
                 <c:pt idx="17">
-                  <c:v>129400</c:v>
+                  <c:v>144900</c:v>
                 </c:pt>
                 <c:pt idx="18">
-                  <c:v>104400</c:v>
+                  <c:v>116900</c:v>
                 </c:pt>
                 <c:pt idx="19">
-                  <c:v>92400</c:v>
+                  <c:v>103400</c:v>
                 </c:pt>
                 <c:pt idx="20">
-                  <c:v>103200</c:v>
+                  <c:v>115600</c:v>
                 </c:pt>
                 <c:pt idx="21">
-                  <c:v>127600</c:v>
+                  <c:v>143000</c:v>
                 </c:pt>
                 <c:pt idx="22">
-                  <c:v>109600</c:v>
+                  <c:v>122800</c:v>
                 </c:pt>
                 <c:pt idx="23">
-                  <c:v>130700</c:v>
+                  <c:v>146300</c:v>
                 </c:pt>
               </c:numCache>
             </c:numRef>
@@ -988,7 +988,7 @@
         <c:axId val="-2100718248"/>
         <c:scaling>
           <c:orientation val="minMax"/>
-          <c:max val="150000.0"/>
+          <c:max val="200000.0"/>
           <c:min val="0.0"/>
         </c:scaling>
         <c:delete val="0"/>
@@ -1182,76 +1182,76 @@
                 <c:formatCode>$#,##0;[Red]($#,##0);"-"</c:formatCode>
                 <c:ptCount val="24"/>
                 <c:pt idx="0">
-                  <c:v>20039</c:v>
+                  <c:v>21764</c:v>
                 </c:pt>
                 <c:pt idx="1">
-                  <c:v>23404</c:v>
+                  <c:v>25374</c:v>
                 </c:pt>
                 <c:pt idx="2">
-                  <c:v>25886</c:v>
+                  <c:v>28056</c:v>
                 </c:pt>
                 <c:pt idx="3">
-                  <c:v>26839</c:v>
+                  <c:v>29044</c:v>
                 </c:pt>
                 <c:pt idx="4">
-                  <c:v>27013</c:v>
+                  <c:v>29290</c:v>
                 </c:pt>
                 <c:pt idx="5">
-                  <c:v>21052</c:v>
+                  <c:v>22765</c:v>
                 </c:pt>
                 <c:pt idx="6">
-                  <c:v>21875</c:v>
+                  <c:v>23665</c:v>
                 </c:pt>
                 <c:pt idx="7">
-                  <c:v>21586</c:v>
+                  <c:v>23449</c:v>
                 </c:pt>
                 <c:pt idx="8">
-                  <c:v>19543</c:v>
+                  <c:v>21245</c:v>
                 </c:pt>
                 <c:pt idx="9">
-                  <c:v>17760</c:v>
+                  <c:v>19288</c:v>
                 </c:pt>
                 <c:pt idx="10">
-                  <c:v>19764</c:v>
+                  <c:v>21418</c:v>
                 </c:pt>
                 <c:pt idx="11">
-                  <c:v>19955</c:v>
+                  <c:v>21677</c:v>
                 </c:pt>
                 <c:pt idx="12">
-                  <c:v>22298</c:v>
+                  <c:v>24166</c:v>
                 </c:pt>
                 <c:pt idx="13">
-                  <c:v>25686</c:v>
+                  <c:v>27966</c:v>
                 </c:pt>
                 <c:pt idx="14">
-                  <c:v>29579</c:v>
+                  <c:v>32083</c:v>
                 </c:pt>
                 <c:pt idx="15">
-                  <c:v>31480</c:v>
+                  <c:v>34106</c:v>
                 </c:pt>
                 <c:pt idx="16">
-                  <c:v>29572</c:v>
+                  <c:v>32108</c:v>
                 </c:pt>
                 <c:pt idx="17">
-                  <c:v>24600</c:v>
+                  <c:v>26678</c:v>
                 </c:pt>
                 <c:pt idx="18">
-                  <c:v>23087</c:v>
+                  <c:v>25067</c:v>
                 </c:pt>
                 <c:pt idx="19">
-                  <c:v>29063</c:v>
+                  <c:v>31592</c:v>
                 </c:pt>
                 <c:pt idx="20">
-                  <c:v>29463</c:v>
+                  <c:v>32082</c:v>
                 </c:pt>
                 <c:pt idx="21">
-                  <c:v>25145</c:v>
+                  <c:v>27260</c:v>
                 </c:pt>
                 <c:pt idx="22">
-                  <c:v>28907</c:v>
+                  <c:v>31373</c:v>
                 </c:pt>
                 <c:pt idx="23">
-                  <c:v>31137</c:v>
+                  <c:v>33810</c:v>
                 </c:pt>
               </c:numCache>
             </c:numRef>
@@ -1825,7 +1825,7 @@
           <a:lstStyle/>
           <a:p>
             <a:r>
-              <a:t>Trades · All. September against September last year: 57.8%; Year to date against the same period last year: 26.5%; Gross margin, year to date: 37.9%. Revenue is 26.5% up on the same period last year, year to date ($574,589 against $454,179). Maintenance contracts make the highest gross margin (59.5%); Installations the lowest (29.4%). The business needs 31.1% gross margin just to cover overheads. Installations: 29.4% gross margin, 5.6 points under the 35.0% target: about $20,473 on $367,900 of revenue this financial year to date. It's below the 31.1% needed to cover overheads, too. Maintenance contracts: 59.5% gross margin, 24.5 points over the 35.0% target ($29,823 ahead on $121,500 this financial year to date).</a:t>
+              <a:t>Trades · All. September against September last year: 57.6%; Year to date against the same period last year: 26.4%; Gross margin, year to date: 44.3%. Revenue is 26.4% up on the same period last year, year to date ($640,593 against $506,783). Maintenance contracts make the highest gross margin (63.9%); Installations the lowest (37.0%). The business needs 39.0% gross margin just to cover overheads. Installations: 37.0% gross margin, 2.0 points over the 35.0% target ($8,257 ahead on $412,100 this financial year to date). Maintenance contracts: 63.9% gross margin, 28.9 points over the 35.0% target ($39,281 ahead on $136,050 this financial year to date).</a:t>
             </a:r>
           </a:p>
         </p:txBody>
@@ -1895,7 +1895,7 @@
           <a:lstStyle/>
           <a:p>
             <a:r>
-              <a:t>Trades · Maintenance contracts. September against September last year: 22.0%; Year to date against the same period last year: 22.0%; Gross margin, year to date: 59.5%. Maintenance contracts brought in $121,500 this financial year to date, 22.0% on the same period last year (slower than the business as a whole, 26.5%), at a 59.5% gross margin (above the 37.9% overall). Maintenance contracts: 59.5% gross margin, 24.5 points over the 35.0% target ($29,823 ahead on $121,500 this financial year to date).</a:t>
+              <a:t>Trades · Maintenance contracts. September against September last year: 21.9%; Year to date against the same period last year: 21.9%; Gross margin, year to date: 63.9%. Maintenance contracts brought in $136,050 this financial year to date, 21.9% on the same period last year (slower than the business as a whole, 26.4%), at a 63.9% gross margin (above the 44.3% overall). Maintenance contracts: 63.9% gross margin, 28.9 points over the 35.0% target ($39,281 ahead on $136,050 this financial year to date).</a:t>
             </a:r>
           </a:p>
         </p:txBody>
@@ -1965,7 +1965,7 @@
           <a:lstStyle/>
           <a:p>
             <a:r>
-              <a:t>Trades · Installations. September against September last year: 74.0%; Year to date against the same period last year: 23.8%; Gross margin, year to date: 29.4%. Installations brought in $367,900 this financial year to date, 23.8% on the same period last year (slower than the business as a whole, 26.5%), at a 29.4% gross margin (below the 37.9% overall). Installations: 29.4% gross margin, 5.6 points under the 35.0% target: about $20,473 on $367,900 of revenue this financial year to date. It's below the 31.1% needed to cover overheads, too.</a:t>
+              <a:t>Trades · Installations. September against September last year: 73.8%; Year to date against the same period last year: 23.8%; Gross margin, year to date: 37.0%. Installations brought in $412,100 this financial year to date, 23.8% on the same period last year (slower than the business as a whole, 26.4%), at a 37.0% gross margin (below the 44.3% overall). Installations: 37.0% gross margin, 2.0 points over the 35.0% target ($8,257 ahead on $412,100 this financial year to date).</a:t>
             </a:r>
           </a:p>
         </p:txBody>
@@ -2035,7 +2035,7 @@
           <a:lstStyle/>
           <a:p>
             <a:r>
-              <a:t>Trades · Call-outs and repairs. September against September last year: 56.0%; Year to date against the same period last year: 48.2%; Gross margin, year to date: 43.7%. Call-outs and repairs brought in $85,189 this financial year to date, 48.2% on the same period last year (faster than the business as a whole, 26.5%), at a 43.7% gross margin (above the 37.9% overall). Call-outs and repairs: 43.7% gross margin, 8.7 points over the 35.0% target ($7,409 ahead on $85,189 this financial year to date).</a:t>
+              <a:t>Trades · Call-outs and repairs. September against September last year: 56.0%; Year to date against the same period last year: 48.2%; Gross margin, year to date: 48.1%. Call-outs and repairs brought in $92,443 this financial year to date, 48.2% on the same period last year (faster than the business as a whole, 26.4%), at a 48.1% gross margin (above the 44.3% overall). Call-outs and repairs: 48.1% gross margin, 13.1 points over the 35.0% target ($12,124 ahead on $92,443 this financial year to date).</a:t>
             </a:r>
           </a:p>
         </p:txBody>
@@ -2105,7 +2105,7 @@
           <a:lstStyle/>
           <a:p>
             <a:r>
-              <a:t>By line: financial year to date (Jul to Sep 2026) against the same period last year · Trades. From gross margin to profit: September's jobs made $73,107 gross margin (36.1%). Technician time not charged to jobs took $3,430 and overheads $59,580, leaving $10,097 profit before tax (5.0% of revenue). To cover overheads, jobs need a 31.1% gross margin on average.</a:t>
+              <a:t>By line: financial year to date (Jul to Sep 2026) against the same period last year · Trades. From gross margin to profit: September's jobs made $96,230 gross margin (42.7%). Technician time not charged to jobs took $28,417 and overheads $59,580, leaving $8,233 profit before tax (3.7% of revenue). To cover overheads, jobs need a 39.0% gross margin on average.</a:t>
             </a:r>
           </a:p>
         </p:txBody>
@@ -5520,7 +5520,7 @@
                 </a:solidFill>
                 <a:latin typeface="Roboto"/>
               </a:rPr>
-              <a:t>Data retrieved 2pm, Tue 6 Oct 2026 · Generated 8 Oct 2026, 9:35am · Sample data · Made with Python (python-pptx)</a:t>
+              <a:t>Data retrieved 2pm, Tue 6 Oct 2026 · Generated 9 Oct 2026, 8:41am · Sample data · Made with Python (python-pptx)</a:t>
             </a:r>
           </a:p>
         </p:txBody>
@@ -5866,7 +5866,7 @@
                 </a:solidFill>
                 <a:latin typeface="Roboto"/>
               </a:rPr>
-              <a:t>57.8%</a:t>
+              <a:t>57.6%</a:t>
             </a:r>
           </a:p>
         </p:txBody>
@@ -5905,7 +5905,7 @@
                 </a:solidFill>
                 <a:latin typeface="Roboto"/>
               </a:rPr>
-              <a:t>$202,337 against $128,255</a:t>
+              <a:t>$225,460 against $143,077</a:t>
             </a:r>
           </a:p>
         </p:txBody>
@@ -6032,7 +6032,7 @@
                 </a:solidFill>
                 <a:latin typeface="Roboto"/>
               </a:rPr>
-              <a:t>26.5%</a:t>
+              <a:t>26.4%</a:t>
             </a:r>
           </a:p>
         </p:txBody>
@@ -6071,7 +6071,7 @@
                 </a:solidFill>
                 <a:latin typeface="Roboto"/>
               </a:rPr>
-              <a:t>$574,589 against $454,179</a:t>
+              <a:t>$640,593 against $506,783</a:t>
             </a:r>
           </a:p>
         </p:txBody>
@@ -6198,7 +6198,7 @@
                 </a:solidFill>
                 <a:latin typeface="Roboto"/>
               </a:rPr>
-              <a:t>37.9%</a:t>
+              <a:t>44.3%</a:t>
             </a:r>
           </a:p>
         </p:txBody>
@@ -6237,7 +6237,7 @@
                 </a:solidFill>
                 <a:latin typeface="Roboto"/>
               </a:rPr>
-              <a:t>$217,865 before overheads</a:t>
+              <a:t>$283,869 before overheads</a:t>
             </a:r>
           </a:p>
         </p:txBody>
@@ -6252,7 +6252,7 @@
         </p:nvGraphicFramePr>
         <p:xfrm>
           <a:off x="457200" y="2604516"/>
-          <a:ext cx="11277295" cy="2119884"/>
+          <a:ext cx="11277295" cy="2318004"/>
         </p:xfrm>
         <a:graphic>
           <a:graphicData uri="http://schemas.openxmlformats.org/drawingml/2006/chart">
@@ -6268,8 +6268,8 @@
         </p:nvSpPr>
         <p:spPr>
           <a:xfrm>
-            <a:off x="457200" y="4815840"/>
-            <a:ext cx="5501487" cy="1493520"/>
+            <a:off x="457200" y="5013960"/>
+            <a:ext cx="5501487" cy="1295400"/>
           </a:xfrm>
           <a:prstGeom prst="rect">
             <a:avLst/>
@@ -6317,7 +6317,7 @@
         </p:nvSpPr>
         <p:spPr>
           <a:xfrm>
-            <a:off x="594360" y="4870704"/>
+            <a:off x="594360" y="5068824"/>
             <a:ext cx="5227167" cy="274320"/>
           </a:xfrm>
           <a:prstGeom prst="rect">
@@ -6356,8 +6356,8 @@
         </p:nvSpPr>
         <p:spPr>
           <a:xfrm>
-            <a:off x="594360" y="5145024"/>
-            <a:ext cx="5227167" cy="1127760"/>
+            <a:off x="594360" y="5343144"/>
+            <a:ext cx="5227167" cy="929640"/>
           </a:xfrm>
           <a:prstGeom prst="rect">
             <a:avLst/>
@@ -6382,7 +6382,7 @@
                 </a:solidFill>
                 <a:latin typeface="Roboto"/>
               </a:rPr>
-              <a:t>Revenue is 26.5% up on the same period last year, year to date ($574,589 against $454,179). Maintenance contracts make the highest gross margin (59.5%); Installations the lowest (29.4%). The business needs 31.1% gross margin just to cover overheads.</a:t>
+              <a:t>Revenue is 26.4% up on the same period last year, year to date ($640,593 against $506,783). Maintenance contracts make the highest gross margin (63.9%); Installations the lowest (37.0%). The business needs 39.0% gross margin just to cover overheads.</a:t>
             </a:r>
           </a:p>
         </p:txBody>
@@ -6395,8 +6395,8 @@
         </p:nvSpPr>
         <p:spPr>
           <a:xfrm>
-            <a:off x="6233007" y="4815840"/>
-            <a:ext cx="5501487" cy="1493520"/>
+            <a:off x="6233007" y="5013960"/>
+            <a:ext cx="5501487" cy="1295400"/>
           </a:xfrm>
           <a:prstGeom prst="rect">
             <a:avLst/>
@@ -6444,7 +6444,7 @@
         </p:nvSpPr>
         <p:spPr>
           <a:xfrm>
-            <a:off x="6370167" y="4870704"/>
+            <a:off x="6370167" y="5068824"/>
             <a:ext cx="5227167" cy="274320"/>
           </a:xfrm>
           <a:prstGeom prst="rect">
@@ -6483,8 +6483,8 @@
         </p:nvSpPr>
         <p:spPr>
           <a:xfrm>
-            <a:off x="6370167" y="5145024"/>
-            <a:ext cx="5227167" cy="1127760"/>
+            <a:off x="6370167" y="5343144"/>
+            <a:ext cx="5227167" cy="929640"/>
           </a:xfrm>
           <a:prstGeom prst="rect">
             <a:avLst/>
@@ -6509,7 +6509,7 @@
                 </a:solidFill>
                 <a:latin typeface="Roboto"/>
               </a:rPr>
-              <a:t>Installations: 29.4% gross margin, 5.6 points under the 35.0% target: about $20,473 on $367,900 of revenue this financial year to date. It's below the 31.1% needed to cover overheads, too. Maintenance contracts: 59.5% gross margin, 24.5 points over the 35.0% target ($29,823 ahead on $121,500 this financial year to date).</a:t>
+              <a:t>Installations: 37.0% gross margin, 2.0 points over the 35.0% target ($8,257 ahead on $412,100 this financial year to date). Maintenance contracts: 63.9% gross margin, 28.9 points over the 35.0% target ($39,281 ahead on $136,050 this financial year to date).</a:t>
             </a:r>
           </a:p>
         </p:txBody>
@@ -6587,7 +6587,7 @@
                 </a:solidFill>
                 <a:latin typeface="Roboto"/>
               </a:rPr>
-              <a:t>Data retrieved 2pm, Tue 6 Oct 2026 · Generated 8 Oct 2026, 9:35am · Sample data · Made with Python (python-pptx)</a:t>
+              <a:t>Data retrieved 2pm, Tue 6 Oct 2026 · Generated 9 Oct 2026, 8:41am · Sample data · Made with Python (python-pptx)</a:t>
             </a:r>
           </a:p>
         </p:txBody>
@@ -6933,7 +6933,7 @@
                 </a:solidFill>
                 <a:latin typeface="Roboto"/>
               </a:rPr>
-              <a:t>22.0%</a:t>
+              <a:t>21.9%</a:t>
             </a:r>
           </a:p>
         </p:txBody>
@@ -6972,7 +6972,7 @@
                 </a:solidFill>
                 <a:latin typeface="Roboto"/>
               </a:rPr>
-              <a:t>$40,500 against $33,200</a:t>
+              <a:t>$45,350 against $37,200</a:t>
             </a:r>
           </a:p>
         </p:txBody>
@@ -7099,7 +7099,7 @@
                 </a:solidFill>
                 <a:latin typeface="Roboto"/>
               </a:rPr>
-              <a:t>22.0%</a:t>
+              <a:t>21.9%</a:t>
             </a:r>
           </a:p>
         </p:txBody>
@@ -7138,7 +7138,7 @@
                 </a:solidFill>
                 <a:latin typeface="Roboto"/>
               </a:rPr>
-              <a:t>$121,500 against $99,600</a:t>
+              <a:t>$136,050 against $111,600</a:t>
             </a:r>
           </a:p>
         </p:txBody>
@@ -7265,7 +7265,7 @@
                 </a:solidFill>
                 <a:latin typeface="Roboto"/>
               </a:rPr>
-              <a:t>59.5%</a:t>
+              <a:t>63.9%</a:t>
             </a:r>
           </a:p>
         </p:txBody>
@@ -7304,7 +7304,7 @@
                 </a:solidFill>
                 <a:latin typeface="Roboto"/>
               </a:rPr>
-              <a:t>$72,348 before overheads</a:t>
+              <a:t>$86,898 before overheads</a:t>
             </a:r>
           </a:p>
         </p:txBody>
@@ -7449,7 +7449,7 @@
                 </a:solidFill>
                 <a:latin typeface="Roboto"/>
               </a:rPr>
-              <a:t>Maintenance contracts brought in $121,500 this financial year to date, 22.0% on the same period last year (slower than the business as a whole, 26.5%), at a 59.5% gross margin (above the 37.9% overall).</a:t>
+              <a:t>Maintenance contracts brought in $136,050 this financial year to date, 21.9% on the same period last year (slower than the business as a whole, 26.4%), at a 63.9% gross margin (above the 44.3% overall).</a:t>
             </a:r>
           </a:p>
         </p:txBody>
@@ -7576,7 +7576,7 @@
                 </a:solidFill>
                 <a:latin typeface="Roboto"/>
               </a:rPr>
-              <a:t>Maintenance contracts: 59.5% gross margin, 24.5 points over the 35.0% target ($29,823 ahead on $121,500 this financial year to date).</a:t>
+              <a:t>Maintenance contracts: 63.9% gross margin, 28.9 points over the 35.0% target ($39,281 ahead on $136,050 this financial year to date).</a:t>
             </a:r>
           </a:p>
         </p:txBody>
@@ -7654,7 +7654,7 @@
                 </a:solidFill>
                 <a:latin typeface="Roboto"/>
               </a:rPr>
-              <a:t>Data retrieved 2pm, Tue 6 Oct 2026 · Generated 8 Oct 2026, 9:35am · Sample data · Made with Python (python-pptx)</a:t>
+              <a:t>Data retrieved 2pm, Tue 6 Oct 2026 · Generated 9 Oct 2026, 8:41am · Sample data · Made with Python (python-pptx)</a:t>
             </a:r>
           </a:p>
         </p:txBody>
@@ -8000,7 +8000,7 @@
                 </a:solidFill>
                 <a:latin typeface="Roboto"/>
               </a:rPr>
-              <a:t>74.0%</a:t>
+              <a:t>73.8%</a:t>
             </a:r>
           </a:p>
         </p:txBody>
@@ -8039,7 +8039,7 @@
                 </a:solidFill>
                 <a:latin typeface="Roboto"/>
               </a:rPr>
-              <a:t>$130,700 against $75,100</a:t>
+              <a:t>$146,300 against $84,200</a:t>
             </a:r>
           </a:p>
         </p:txBody>
@@ -8205,7 +8205,7 @@
                 </a:solidFill>
                 <a:latin typeface="Roboto"/>
               </a:rPr>
-              <a:t>$367,900 against $297,100</a:t>
+              <a:t>$412,100 against $332,800</a:t>
             </a:r>
           </a:p>
         </p:txBody>
@@ -8332,7 +8332,7 @@
                 </a:solidFill>
                 <a:latin typeface="Roboto"/>
               </a:rPr>
-              <a:t>29.4%</a:t>
+              <a:t>37.0%</a:t>
             </a:r>
           </a:p>
         </p:txBody>
@@ -8371,7 +8371,7 @@
                 </a:solidFill>
                 <a:latin typeface="Roboto"/>
               </a:rPr>
-              <a:t>$108,292 before overheads</a:t>
+              <a:t>$152,492 before overheads</a:t>
             </a:r>
           </a:p>
         </p:txBody>
@@ -8516,7 +8516,7 @@
                 </a:solidFill>
                 <a:latin typeface="Roboto"/>
               </a:rPr>
-              <a:t>Installations brought in $367,900 this financial year to date, 23.8% on the same period last year (slower than the business as a whole, 26.5%), at a 29.4% gross margin (below the 37.9% overall).</a:t>
+              <a:t>Installations brought in $412,100 this financial year to date, 23.8% on the same period last year (slower than the business as a whole, 26.4%), at a 37.0% gross margin (below the 44.3% overall).</a:t>
             </a:r>
           </a:p>
         </p:txBody>
@@ -8643,7 +8643,7 @@
                 </a:solidFill>
                 <a:latin typeface="Roboto"/>
               </a:rPr>
-              <a:t>Installations: 29.4% gross margin, 5.6 points under the 35.0% target: about $20,473 on $367,900 of revenue this financial year to date. It's below the 31.1% needed to cover overheads, too.</a:t>
+              <a:t>Installations: 37.0% gross margin, 2.0 points over the 35.0% target ($8,257 ahead on $412,100 this financial year to date).</a:t>
             </a:r>
           </a:p>
         </p:txBody>
@@ -8721,7 +8721,7 @@
                 </a:solidFill>
                 <a:latin typeface="Roboto"/>
               </a:rPr>
-              <a:t>Data retrieved 2pm, Tue 6 Oct 2026 · Generated 8 Oct 2026, 9:35am · Sample data · Made with Python (python-pptx)</a:t>
+              <a:t>Data retrieved 2pm, Tue 6 Oct 2026 · Generated 9 Oct 2026, 8:41am · Sample data · Made with Python (python-pptx)</a:t>
             </a:r>
           </a:p>
         </p:txBody>
@@ -9106,7 +9106,7 @@
                 </a:solidFill>
                 <a:latin typeface="Roboto"/>
               </a:rPr>
-              <a:t>$31,137 against $19,955</a:t>
+              <a:t>$33,810 against $21,677</a:t>
             </a:r>
           </a:p>
         </p:txBody>
@@ -9272,7 +9272,7 @@
                 </a:solidFill>
                 <a:latin typeface="Roboto"/>
               </a:rPr>
-              <a:t>$85,189 against $57,479</a:t>
+              <a:t>$92,443 against $62,383</a:t>
             </a:r>
           </a:p>
         </p:txBody>
@@ -9399,7 +9399,7 @@
                 </a:solidFill>
                 <a:latin typeface="Roboto"/>
               </a:rPr>
-              <a:t>43.7%</a:t>
+              <a:t>48.1%</a:t>
             </a:r>
           </a:p>
         </p:txBody>
@@ -9438,7 +9438,7 @@
                 </a:solidFill>
                 <a:latin typeface="Roboto"/>
               </a:rPr>
-              <a:t>$37,225 before overheads</a:t>
+              <a:t>$44,479 before overheads</a:t>
             </a:r>
           </a:p>
         </p:txBody>
@@ -9583,7 +9583,7 @@
                 </a:solidFill>
                 <a:latin typeface="Roboto"/>
               </a:rPr>
-              <a:t>Call-outs and repairs brought in $85,189 this financial year to date, 48.2% on the same period last year (faster than the business as a whole, 26.5%), at a 43.7% gross margin (above the 37.9% overall).</a:t>
+              <a:t>Call-outs and repairs brought in $92,443 this financial year to date, 48.2% on the same period last year (faster than the business as a whole, 26.4%), at a 48.1% gross margin (above the 44.3% overall).</a:t>
             </a:r>
           </a:p>
         </p:txBody>
@@ -9710,7 +9710,7 @@
                 </a:solidFill>
                 <a:latin typeface="Roboto"/>
               </a:rPr>
-              <a:t>Call-outs and repairs: 43.7% gross margin, 8.7 points over the 35.0% target ($7,409 ahead on $85,189 this financial year to date).</a:t>
+              <a:t>Call-outs and repairs: 48.1% gross margin, 13.1 points over the 35.0% target ($12,124 ahead on $92,443 this financial year to date).</a:t>
             </a:r>
           </a:p>
         </p:txBody>
@@ -9788,7 +9788,7 @@
                 </a:solidFill>
                 <a:latin typeface="Roboto"/>
               </a:rPr>
-              <a:t>Data retrieved 2pm, Tue 6 Oct 2026 · Generated 8 Oct 2026, 9:35am · Sample data · Made with Python (python-pptx)</a:t>
+              <a:t>Data retrieved 2pm, Tue 6 Oct 2026 · Generated 9 Oct 2026, 8:41am · Sample data · Made with Python (python-pptx)</a:t>
             </a:r>
           </a:p>
         </p:txBody>
@@ -10007,7 +10007,7 @@
                 </a:solidFill>
                 <a:latin typeface="Roboto"/>
               </a:rPr>
-              <a:t>From gross margin to profit: September's jobs made $73,107 gross margin (36.1%). Technician time not charged to jobs took $3,430 and overheads $59,580, leaving $10,097 profit before tax (5.0% of revenue). To cover overheads, jobs need a 31.1% gross margin on average.</a:t>
+              <a:t>From gross margin to profit: September's jobs made $96,230 gross margin (42.7%). Technician time not charged to jobs took $28,417 and overheads $59,580, leaving $8,233 profit before tax (3.7% of revenue). To cover overheads, jobs need a 39.0% gross margin on average.</a:t>
             </a:r>
           </a:p>
         </p:txBody>
@@ -10238,7 +10238,7 @@
                           </a:solidFill>
                           <a:latin typeface="Roboto"/>
                         </a:rPr>
-                        <a:t>$121,500</a:t>
+                        <a:t>$136,050</a:t>
                       </a:r>
                     </a:p>
                   </a:txBody>
@@ -10265,7 +10265,7 @@
                           </a:solidFill>
                           <a:latin typeface="Roboto"/>
                         </a:rPr>
-                        <a:t>$99,600</a:t>
+                        <a:t>$111,600</a:t>
                       </a:r>
                     </a:p>
                   </a:txBody>
@@ -10292,7 +10292,7 @@
                           </a:solidFill>
                           <a:latin typeface="Roboto"/>
                         </a:rPr>
-                        <a:t>22.0%</a:t>
+                        <a:t>21.9%</a:t>
                       </a:r>
                     </a:p>
                   </a:txBody>
@@ -10319,7 +10319,7 @@
                           </a:solidFill>
                           <a:latin typeface="Roboto"/>
                         </a:rPr>
-                        <a:t>$72,348</a:t>
+                        <a:t>$86,898</a:t>
                       </a:r>
                     </a:p>
                   </a:txBody>
@@ -10346,7 +10346,7 @@
                           </a:solidFill>
                           <a:latin typeface="Roboto"/>
                         </a:rPr>
-                        <a:t>59.5%</a:t>
+                        <a:t>63.9%</a:t>
                       </a:r>
                     </a:p>
                   </a:txBody>
@@ -10402,7 +10402,7 @@
                           </a:solidFill>
                           <a:latin typeface="Roboto"/>
                         </a:rPr>
-                        <a:t>$367,900</a:t>
+                        <a:t>$412,100</a:t>
                       </a:r>
                     </a:p>
                   </a:txBody>
@@ -10429,7 +10429,7 @@
                           </a:solidFill>
                           <a:latin typeface="Roboto"/>
                         </a:rPr>
-                        <a:t>$297,100</a:t>
+                        <a:t>$332,800</a:t>
                       </a:r>
                     </a:p>
                   </a:txBody>
@@ -10483,7 +10483,7 @@
                           </a:solidFill>
                           <a:latin typeface="Roboto"/>
                         </a:rPr>
-                        <a:t>$108,292</a:t>
+                        <a:t>$152,492</a:t>
                       </a:r>
                     </a:p>
                   </a:txBody>
@@ -10510,7 +10510,7 @@
                           </a:solidFill>
                           <a:latin typeface="Roboto"/>
                         </a:rPr>
-                        <a:t>29.4%</a:t>
+                        <a:t>37.0%</a:t>
                       </a:r>
                     </a:p>
                   </a:txBody>
@@ -10566,7 +10566,7 @@
                           </a:solidFill>
                           <a:latin typeface="Roboto"/>
                         </a:rPr>
-                        <a:t>$85,189</a:t>
+                        <a:t>$92,443</a:t>
                       </a:r>
                     </a:p>
                   </a:txBody>
@@ -10593,7 +10593,7 @@
                           </a:solidFill>
                           <a:latin typeface="Roboto"/>
                         </a:rPr>
-                        <a:t>$57,479</a:t>
+                        <a:t>$62,383</a:t>
                       </a:r>
                     </a:p>
                   </a:txBody>
@@ -10647,7 +10647,7 @@
                           </a:solidFill>
                           <a:latin typeface="Roboto"/>
                         </a:rPr>
-                        <a:t>$37,225</a:t>
+                        <a:t>$44,479</a:t>
                       </a:r>
                     </a:p>
                   </a:txBody>
@@ -10674,7 +10674,7 @@
                           </a:solidFill>
                           <a:latin typeface="Roboto"/>
                         </a:rPr>
-                        <a:t>43.7%</a:t>
+                        <a:t>48.1%</a:t>
                       </a:r>
                     </a:p>
                   </a:txBody>
@@ -10730,7 +10730,7 @@
                           </a:solidFill>
                           <a:latin typeface="Roboto"/>
                         </a:rPr>
-                        <a:t>$574,589</a:t>
+                        <a:t>$640,593</a:t>
                       </a:r>
                     </a:p>
                   </a:txBody>
@@ -10757,7 +10757,7 @@
                           </a:solidFill>
                           <a:latin typeface="Roboto"/>
                         </a:rPr>
-                        <a:t>$454,179</a:t>
+                        <a:t>$506,783</a:t>
                       </a:r>
                     </a:p>
                   </a:txBody>
@@ -10784,7 +10784,7 @@
                           </a:solidFill>
                           <a:latin typeface="Roboto"/>
                         </a:rPr>
-                        <a:t>26.5%</a:t>
+                        <a:t>26.4%</a:t>
                       </a:r>
                     </a:p>
                   </a:txBody>
@@ -10811,7 +10811,7 @@
                           </a:solidFill>
                           <a:latin typeface="Roboto"/>
                         </a:rPr>
-                        <a:t>$217,865</a:t>
+                        <a:t>$283,869</a:t>
                       </a:r>
                     </a:p>
                   </a:txBody>
@@ -10838,7 +10838,7 @@
                           </a:solidFill>
                           <a:latin typeface="Roboto"/>
                         </a:rPr>
-                        <a:t>37.9%</a:t>
+                        <a:t>44.3%</a:t>
                       </a:r>
                     </a:p>
                   </a:txBody>
@@ -10926,7 +10926,7 @@
                 </a:solidFill>
                 <a:latin typeface="Roboto"/>
               </a:rPr>
-              <a:t>Data retrieved 2pm, Tue 6 Oct 2026 · Generated 8 Oct 2026, 9:35am · Sample data · Made with Python (python-pptx)</a:t>
+              <a:t>Data retrieved 2pm, Tue 6 Oct 2026 · Generated 9 Oct 2026, 8:41am · Sample data · Made with Python (python-pptx)</a:t>
             </a:r>
           </a:p>
         </p:txBody>
